--- a/output_pptx/Christ_Our_Hope_In_Life_And_Death.pptx
+++ b/output_pptx/Christ_Our_Hope_In_Life_And_Death.pptx
@@ -3110,8 +3110,8 @@
         </p:nvSpPr>
         <p:spPr>
           <a:xfrm>
-            <a:off x="594360" y="2258568"/>
-            <a:ext cx="11002975" cy="685800"/>
+            <a:off x="640080" y="2052828"/>
+            <a:ext cx="10911535" cy="731520"/>
           </a:xfrm>
           <a:prstGeom prst="rect">
             <a:avLst/>
@@ -3126,7 +3126,7 @@
           <a:p>
             <a:pPr algn="ctr"/>
             <a:r>
-              <a:rPr sz="4022" b="1" i="0">
+              <a:rPr sz="4300" b="1" i="0">
                 <a:solidFill>
                   <a:srgbClr val="FFFFFF"/>
                 </a:solidFill>
@@ -3145,8 +3145,8 @@
         </p:nvSpPr>
         <p:spPr>
           <a:xfrm>
-            <a:off x="594360" y="2980944"/>
-            <a:ext cx="11002975" cy="347472"/>
+            <a:off x="640080" y="2985516"/>
+            <a:ext cx="10911535" cy="731520"/>
           </a:xfrm>
           <a:prstGeom prst="rect">
             <a:avLst/>
@@ -3161,83 +3161,13 @@
           <a:p>
             <a:pPr algn="ctr"/>
             <a:r>
-              <a:rPr sz="2200" b="0" i="1">
-                <a:solidFill>
-                  <a:srgbClr val="8C8C8C"/>
-                </a:solidFill>
-                <a:latin typeface="Arial"/>
-              </a:rPr>
-              <a:t/>
-            </a:r>
-          </a:p>
-        </p:txBody>
-      </p:sp>
-      <p:sp>
-        <p:nvSpPr>
-          <p:cNvPr id="4" name="TextBox 3"/>
-          <p:cNvSpPr txBox="1"/>
-          <p:nvPr/>
-        </p:nvSpPr>
-        <p:spPr>
-          <a:xfrm>
-            <a:off x="594360" y="3529584"/>
-            <a:ext cx="11002975" cy="685800"/>
-          </a:xfrm>
-          <a:prstGeom prst="rect">
-            <a:avLst/>
-          </a:prstGeom>
-          <a:noFill/>
-        </p:spPr>
-        <p:txBody>
-          <a:bodyPr wrap="square">
-            <a:spAutoFit/>
-          </a:bodyPr>
-          <a:lstStyle/>
-          <a:p>
-            <a:pPr algn="ctr"/>
-            <a:r>
-              <a:rPr sz="4400" b="1" i="0">
+              <a:rPr sz="4800" b="1" i="0">
                 <a:solidFill>
                   <a:srgbClr val="FFFFFF"/>
                 </a:solidFill>
                 <a:latin typeface="Arial"/>
               </a:rPr>
               <a:t>Cristo atrás de nós e por nós</a:t>
-            </a:r>
-          </a:p>
-        </p:txBody>
-      </p:sp>
-      <p:sp>
-        <p:nvSpPr>
-          <p:cNvPr id="5" name="TextBox 4"/>
-          <p:cNvSpPr txBox="1"/>
-          <p:nvPr/>
-        </p:nvSpPr>
-        <p:spPr>
-          <a:xfrm>
-            <a:off x="594360" y="4251960"/>
-            <a:ext cx="11002975" cy="347472"/>
-          </a:xfrm>
-          <a:prstGeom prst="rect">
-            <a:avLst/>
-          </a:prstGeom>
-          <a:noFill/>
-        </p:spPr>
-        <p:txBody>
-          <a:bodyPr wrap="square">
-            <a:spAutoFit/>
-          </a:bodyPr>
-          <a:lstStyle/>
-          <a:p>
-            <a:pPr algn="ctr"/>
-            <a:r>
-              <a:rPr sz="2200" b="0" i="1">
-                <a:solidFill>
-                  <a:srgbClr val="8C8C8C"/>
-                </a:solidFill>
-                <a:latin typeface="Arial"/>
-              </a:rPr>
-              <a:t/>
             </a:r>
           </a:p>
         </p:txBody>
@@ -3276,8 +3206,8 @@
         </p:nvSpPr>
         <p:spPr>
           <a:xfrm>
-            <a:off x="594360" y="2258568"/>
-            <a:ext cx="11002975" cy="685800"/>
+            <a:off x="640080" y="2052828"/>
+            <a:ext cx="10911535" cy="731520"/>
           </a:xfrm>
           <a:prstGeom prst="rect">
             <a:avLst/>
@@ -3292,7 +3222,7 @@
           <a:p>
             <a:pPr algn="ctr"/>
             <a:r>
-              <a:rPr sz="4141" b="1" i="0">
+              <a:rPr sz="4500" b="1" i="0">
                 <a:solidFill>
                   <a:srgbClr val="FFFFFF"/>
                 </a:solidFill>
@@ -3311,8 +3241,8 @@
         </p:nvSpPr>
         <p:spPr>
           <a:xfrm>
-            <a:off x="594360" y="2980944"/>
-            <a:ext cx="11002975" cy="347472"/>
+            <a:off x="640080" y="2985516"/>
+            <a:ext cx="10911535" cy="731520"/>
           </a:xfrm>
           <a:prstGeom prst="rect">
             <a:avLst/>
@@ -3327,83 +3257,13 @@
           <a:p>
             <a:pPr algn="ctr"/>
             <a:r>
-              <a:rPr sz="2200" b="0" i="1">
-                <a:solidFill>
-                  <a:srgbClr val="8C8C8C"/>
-                </a:solidFill>
-                <a:latin typeface="Arial"/>
-              </a:rPr>
-              <a:t/>
-            </a:r>
-          </a:p>
-        </p:txBody>
-      </p:sp>
-      <p:sp>
-        <p:nvSpPr>
-          <p:cNvPr id="4" name="TextBox 3"/>
-          <p:cNvSpPr txBox="1"/>
-          <p:nvPr/>
-        </p:nvSpPr>
-        <p:spPr>
-          <a:xfrm>
-            <a:off x="594360" y="3529584"/>
-            <a:ext cx="11002975" cy="685800"/>
-          </a:xfrm>
-          <a:prstGeom prst="rect">
-            <a:avLst/>
-          </a:prstGeom>
-          <a:noFill/>
-        </p:spPr>
-        <p:txBody>
-          <a:bodyPr wrap="square">
-            <a:spAutoFit/>
-          </a:bodyPr>
-          <a:lstStyle/>
-          <a:p>
-            <a:pPr algn="ctr"/>
-            <a:r>
-              <a:rPr sz="4022" b="1" i="0">
+              <a:rPr sz="4300" b="1" i="0">
                 <a:solidFill>
                   <a:srgbClr val="FFFFFF"/>
                 </a:solidFill>
                 <a:latin typeface="Arial"/>
               </a:rPr>
               <a:t>Nossa esperança na vida e na morte?</a:t>
-            </a:r>
-          </a:p>
-        </p:txBody>
-      </p:sp>
-      <p:sp>
-        <p:nvSpPr>
-          <p:cNvPr id="5" name="TextBox 4"/>
-          <p:cNvSpPr txBox="1"/>
-          <p:nvPr/>
-        </p:nvSpPr>
-        <p:spPr>
-          <a:xfrm>
-            <a:off x="594360" y="4251960"/>
-            <a:ext cx="11002975" cy="347472"/>
-          </a:xfrm>
-          <a:prstGeom prst="rect">
-            <a:avLst/>
-          </a:prstGeom>
-          <a:noFill/>
-        </p:spPr>
-        <p:txBody>
-          <a:bodyPr wrap="square">
-            <a:spAutoFit/>
-          </a:bodyPr>
-          <a:lstStyle/>
-          <a:p>
-            <a:pPr algn="ctr"/>
-            <a:r>
-              <a:rPr sz="2200" b="0" i="1">
-                <a:solidFill>
-                  <a:srgbClr val="8C8C8C"/>
-                </a:solidFill>
-                <a:latin typeface="Arial"/>
-              </a:rPr>
-              <a:t/>
             </a:r>
           </a:p>
         </p:txBody>
@@ -3442,8 +3302,8 @@
         </p:nvSpPr>
         <p:spPr>
           <a:xfrm>
-            <a:off x="594360" y="2258568"/>
-            <a:ext cx="11002975" cy="685800"/>
+            <a:off x="640080" y="2052828"/>
+            <a:ext cx="10911535" cy="731520"/>
           </a:xfrm>
           <a:prstGeom prst="rect">
             <a:avLst/>
@@ -3458,7 +3318,7 @@
           <a:p>
             <a:pPr algn="ctr"/>
             <a:r>
-              <a:rPr sz="4400" b="1" i="0">
+              <a:rPr sz="4800" b="1" i="0">
                 <a:solidFill>
                   <a:srgbClr val="FFFFFF"/>
                 </a:solidFill>
@@ -3477,8 +3337,8 @@
         </p:nvSpPr>
         <p:spPr>
           <a:xfrm>
-            <a:off x="594360" y="2980944"/>
-            <a:ext cx="11002975" cy="347472"/>
+            <a:off x="640080" y="2985516"/>
+            <a:ext cx="10911535" cy="731520"/>
           </a:xfrm>
           <a:prstGeom prst="rect">
             <a:avLst/>
@@ -3493,83 +3353,13 @@
           <a:p>
             <a:pPr algn="ctr"/>
             <a:r>
-              <a:rPr sz="2200" b="0" i="1">
-                <a:solidFill>
-                  <a:srgbClr val="8C8C8C"/>
-                </a:solidFill>
-                <a:latin typeface="Arial"/>
-              </a:rPr>
-              <a:t/>
-            </a:r>
-          </a:p>
-        </p:txBody>
-      </p:sp>
-      <p:sp>
-        <p:nvSpPr>
-          <p:cNvPr id="4" name="TextBox 3"/>
-          <p:cNvSpPr txBox="1"/>
-          <p:nvPr/>
-        </p:nvSpPr>
-        <p:spPr>
-          <a:xfrm>
-            <a:off x="594360" y="3529584"/>
-            <a:ext cx="11002975" cy="685800"/>
-          </a:xfrm>
-          <a:prstGeom prst="rect">
-            <a:avLst/>
-          </a:prstGeom>
-          <a:noFill/>
-        </p:spPr>
-        <p:txBody>
-          <a:bodyPr wrap="square">
-            <a:spAutoFit/>
-          </a:bodyPr>
-          <a:lstStyle/>
-          <a:p>
-            <a:pPr algn="ctr"/>
-            <a:r>
-              <a:rPr sz="4022" b="1" i="0">
+              <a:rPr sz="4300" b="1" i="0">
                 <a:solidFill>
                   <a:srgbClr val="FFFFFF"/>
                 </a:solidFill>
                 <a:latin typeface="Arial"/>
               </a:rPr>
               <a:t>Cristo conosco, Cristo antes de nós</a:t>
-            </a:r>
-          </a:p>
-        </p:txBody>
-      </p:sp>
-      <p:sp>
-        <p:nvSpPr>
-          <p:cNvPr id="5" name="TextBox 4"/>
-          <p:cNvSpPr txBox="1"/>
-          <p:nvPr/>
-        </p:nvSpPr>
-        <p:spPr>
-          <a:xfrm>
-            <a:off x="594360" y="4251960"/>
-            <a:ext cx="11002975" cy="347472"/>
-          </a:xfrm>
-          <a:prstGeom prst="rect">
-            <a:avLst/>
-          </a:prstGeom>
-          <a:noFill/>
-        </p:spPr>
-        <p:txBody>
-          <a:bodyPr wrap="square">
-            <a:spAutoFit/>
-          </a:bodyPr>
-          <a:lstStyle/>
-          <a:p>
-            <a:pPr algn="ctr"/>
-            <a:r>
-              <a:rPr sz="2200" b="0" i="1">
-                <a:solidFill>
-                  <a:srgbClr val="8C8C8C"/>
-                </a:solidFill>
-                <a:latin typeface="Arial"/>
-              </a:rPr>
-              <a:t/>
             </a:r>
           </a:p>
         </p:txBody>
@@ -3608,8 +3398,8 @@
         </p:nvSpPr>
         <p:spPr>
           <a:xfrm>
-            <a:off x="594360" y="2258568"/>
-            <a:ext cx="11002975" cy="685800"/>
+            <a:off x="640080" y="2052828"/>
+            <a:ext cx="10911535" cy="731520"/>
           </a:xfrm>
           <a:prstGeom prst="rect">
             <a:avLst/>
@@ -3624,7 +3414,7 @@
           <a:p>
             <a:pPr algn="ctr"/>
             <a:r>
-              <a:rPr sz="4400" b="1" i="0">
+              <a:rPr sz="4800" b="1" i="0">
                 <a:solidFill>
                   <a:srgbClr val="FFFFFF"/>
                 </a:solidFill>
@@ -3643,8 +3433,8 @@
         </p:nvSpPr>
         <p:spPr>
           <a:xfrm>
-            <a:off x="594360" y="2980944"/>
-            <a:ext cx="11002975" cy="347472"/>
+            <a:off x="640080" y="2985516"/>
+            <a:ext cx="10911535" cy="731520"/>
           </a:xfrm>
           <a:prstGeom prst="rect">
             <a:avLst/>
@@ -3659,83 +3449,13 @@
           <a:p>
             <a:pPr algn="ctr"/>
             <a:r>
-              <a:rPr sz="2200" b="0" i="1">
-                <a:solidFill>
-                  <a:srgbClr val="8C8C8C"/>
-                </a:solidFill>
-                <a:latin typeface="Arial"/>
-              </a:rPr>
-              <a:t/>
-            </a:r>
-          </a:p>
-        </p:txBody>
-      </p:sp>
-      <p:sp>
-        <p:nvSpPr>
-          <p:cNvPr id="4" name="TextBox 3"/>
-          <p:cNvSpPr txBox="1"/>
-          <p:nvPr/>
-        </p:nvSpPr>
-        <p:spPr>
-          <a:xfrm>
-            <a:off x="594360" y="3529584"/>
-            <a:ext cx="11002975" cy="685800"/>
-          </a:xfrm>
-          <a:prstGeom prst="rect">
-            <a:avLst/>
-          </a:prstGeom>
-          <a:noFill/>
-        </p:spPr>
-        <p:txBody>
-          <a:bodyPr wrap="square">
-            <a:spAutoFit/>
-          </a:bodyPr>
-          <a:lstStyle/>
-          <a:p>
-            <a:pPr algn="ctr"/>
-            <a:r>
-              <a:rPr sz="4141" b="1" i="0">
+              <a:rPr sz="4500" b="1" i="0">
                 <a:solidFill>
                   <a:srgbClr val="FFFFFF"/>
                 </a:solidFill>
                 <a:latin typeface="Arial"/>
               </a:rPr>
               <a:t>Cristo acima de nós, Cristo em nós</a:t>
-            </a:r>
-          </a:p>
-        </p:txBody>
-      </p:sp>
-      <p:sp>
-        <p:nvSpPr>
-          <p:cNvPr id="5" name="TextBox 4"/>
-          <p:cNvSpPr txBox="1"/>
-          <p:nvPr/>
-        </p:nvSpPr>
-        <p:spPr>
-          <a:xfrm>
-            <a:off x="594360" y="4251960"/>
-            <a:ext cx="11002975" cy="347472"/>
-          </a:xfrm>
-          <a:prstGeom prst="rect">
-            <a:avLst/>
-          </a:prstGeom>
-          <a:noFill/>
-        </p:spPr>
-        <p:txBody>
-          <a:bodyPr wrap="square">
-            <a:spAutoFit/>
-          </a:bodyPr>
-          <a:lstStyle/>
-          <a:p>
-            <a:pPr algn="ctr"/>
-            <a:r>
-              <a:rPr sz="2200" b="0" i="1">
-                <a:solidFill>
-                  <a:srgbClr val="8C8C8C"/>
-                </a:solidFill>
-                <a:latin typeface="Arial"/>
-              </a:rPr>
-              <a:t/>
             </a:r>
           </a:p>
         </p:txBody>
@@ -3774,8 +3494,8 @@
         </p:nvSpPr>
         <p:spPr>
           <a:xfrm>
-            <a:off x="594360" y="2258568"/>
-            <a:ext cx="11002975" cy="685800"/>
+            <a:off x="640080" y="2052828"/>
+            <a:ext cx="10911535" cy="731520"/>
           </a:xfrm>
           <a:prstGeom prst="rect">
             <a:avLst/>
@@ -3790,7 +3510,7 @@
           <a:p>
             <a:pPr algn="ctr"/>
             <a:r>
-              <a:rPr sz="4400" b="1" i="0">
+              <a:rPr sz="4800" b="1" i="0">
                 <a:solidFill>
                   <a:srgbClr val="FFFFFF"/>
                 </a:solidFill>
@@ -3809,8 +3529,8 @@
         </p:nvSpPr>
         <p:spPr>
           <a:xfrm>
-            <a:off x="594360" y="2980944"/>
-            <a:ext cx="11002975" cy="347472"/>
+            <a:off x="640080" y="2985516"/>
+            <a:ext cx="10911535" cy="731520"/>
           </a:xfrm>
           <a:prstGeom prst="rect">
             <a:avLst/>
@@ -3825,83 +3545,13 @@
           <a:p>
             <a:pPr algn="ctr"/>
             <a:r>
-              <a:rPr sz="2200" b="0" i="1">
-                <a:solidFill>
-                  <a:srgbClr val="8C8C8C"/>
-                </a:solidFill>
-                <a:latin typeface="Arial"/>
-              </a:rPr>
-              <a:t/>
-            </a:r>
-          </a:p>
-        </p:txBody>
-      </p:sp>
-      <p:sp>
-        <p:nvSpPr>
-          <p:cNvPr id="4" name="TextBox 3"/>
-          <p:cNvSpPr txBox="1"/>
-          <p:nvPr/>
-        </p:nvSpPr>
-        <p:spPr>
-          <a:xfrm>
-            <a:off x="594360" y="3529584"/>
-            <a:ext cx="11002975" cy="685800"/>
-          </a:xfrm>
-          <a:prstGeom prst="rect">
-            <a:avLst/>
-          </a:prstGeom>
-          <a:noFill/>
-        </p:spPr>
-        <p:txBody>
-          <a:bodyPr wrap="square">
-            <a:spAutoFit/>
-          </a:bodyPr>
-          <a:lstStyle/>
-          <a:p>
-            <a:pPr algn="ctr"/>
-            <a:r>
-              <a:rPr sz="4022" b="1" i="0">
+              <a:rPr sz="4300" b="1" i="0">
                 <a:solidFill>
                   <a:srgbClr val="FFFFFF"/>
                 </a:solidFill>
                 <a:latin typeface="Arial"/>
               </a:rPr>
               <a:t>Cristo conosco, Cristo antes de nós</a:t>
-            </a:r>
-          </a:p>
-        </p:txBody>
-      </p:sp>
-      <p:sp>
-        <p:nvSpPr>
-          <p:cNvPr id="5" name="TextBox 4"/>
-          <p:cNvSpPr txBox="1"/>
-          <p:nvPr/>
-        </p:nvSpPr>
-        <p:spPr>
-          <a:xfrm>
-            <a:off x="594360" y="4251960"/>
-            <a:ext cx="11002975" cy="347472"/>
-          </a:xfrm>
-          <a:prstGeom prst="rect">
-            <a:avLst/>
-          </a:prstGeom>
-          <a:noFill/>
-        </p:spPr>
-        <p:txBody>
-          <a:bodyPr wrap="square">
-            <a:spAutoFit/>
-          </a:bodyPr>
-          <a:lstStyle/>
-          <a:p>
-            <a:pPr algn="ctr"/>
-            <a:r>
-              <a:rPr sz="2200" b="0" i="1">
-                <a:solidFill>
-                  <a:srgbClr val="8C8C8C"/>
-                </a:solidFill>
-                <a:latin typeface="Arial"/>
-              </a:rPr>
-              <a:t/>
             </a:r>
           </a:p>
         </p:txBody>
@@ -3940,8 +3590,8 @@
         </p:nvSpPr>
         <p:spPr>
           <a:xfrm>
-            <a:off x="594360" y="2258568"/>
-            <a:ext cx="11002975" cy="685800"/>
+            <a:off x="640080" y="2052828"/>
+            <a:ext cx="10911535" cy="731520"/>
           </a:xfrm>
           <a:prstGeom prst="rect">
             <a:avLst/>
@@ -3956,7 +3606,7 @@
           <a:p>
             <a:pPr algn="ctr"/>
             <a:r>
-              <a:rPr sz="4400" b="1" i="0">
+              <a:rPr sz="4800" b="1" i="0">
                 <a:solidFill>
                   <a:srgbClr val="FFFFFF"/>
                 </a:solidFill>
@@ -3975,8 +3625,8 @@
         </p:nvSpPr>
         <p:spPr>
           <a:xfrm>
-            <a:off x="594360" y="2980944"/>
-            <a:ext cx="11002975" cy="347472"/>
+            <a:off x="640080" y="2985516"/>
+            <a:ext cx="10911535" cy="731520"/>
           </a:xfrm>
           <a:prstGeom prst="rect">
             <a:avLst/>
@@ -3991,83 +3641,13 @@
           <a:p>
             <a:pPr algn="ctr"/>
             <a:r>
-              <a:rPr sz="2200" b="0" i="1">
-                <a:solidFill>
-                  <a:srgbClr val="8C8C8C"/>
-                </a:solidFill>
-                <a:latin typeface="Arial"/>
-              </a:rPr>
-              <a:t/>
-            </a:r>
-          </a:p>
-        </p:txBody>
-      </p:sp>
-      <p:sp>
-        <p:nvSpPr>
-          <p:cNvPr id="4" name="TextBox 3"/>
-          <p:cNvSpPr txBox="1"/>
-          <p:nvPr/>
-        </p:nvSpPr>
-        <p:spPr>
-          <a:xfrm>
-            <a:off x="594360" y="3529584"/>
-            <a:ext cx="11002975" cy="685800"/>
-          </a:xfrm>
-          <a:prstGeom prst="rect">
-            <a:avLst/>
-          </a:prstGeom>
-          <a:noFill/>
-        </p:spPr>
-        <p:txBody>
-          <a:bodyPr wrap="square">
-            <a:spAutoFit/>
-          </a:bodyPr>
-          <a:lstStyle/>
-          <a:p>
-            <a:pPr algn="ctr"/>
-            <a:r>
-              <a:rPr sz="4141" b="1" i="0">
+              <a:rPr sz="4500" b="1" i="0">
                 <a:solidFill>
                   <a:srgbClr val="FFFFFF"/>
                 </a:solidFill>
                 <a:latin typeface="Arial"/>
               </a:rPr>
               <a:t>Cristo acima de nós, Cristo em nós</a:t>
-            </a:r>
-          </a:p>
-        </p:txBody>
-      </p:sp>
-      <p:sp>
-        <p:nvSpPr>
-          <p:cNvPr id="5" name="TextBox 4"/>
-          <p:cNvSpPr txBox="1"/>
-          <p:nvPr/>
-        </p:nvSpPr>
-        <p:spPr>
-          <a:xfrm>
-            <a:off x="594360" y="4251960"/>
-            <a:ext cx="11002975" cy="347472"/>
-          </a:xfrm>
-          <a:prstGeom prst="rect">
-            <a:avLst/>
-          </a:prstGeom>
-          <a:noFill/>
-        </p:spPr>
-        <p:txBody>
-          <a:bodyPr wrap="square">
-            <a:spAutoFit/>
-          </a:bodyPr>
-          <a:lstStyle/>
-          <a:p>
-            <a:pPr algn="ctr"/>
-            <a:r>
-              <a:rPr sz="2200" b="0" i="1">
-                <a:solidFill>
-                  <a:srgbClr val="8C8C8C"/>
-                </a:solidFill>
-                <a:latin typeface="Arial"/>
-              </a:rPr>
-              <a:t/>
             </a:r>
           </a:p>
         </p:txBody>
@@ -4106,8 +3686,8 @@
         </p:nvSpPr>
         <p:spPr>
           <a:xfrm>
-            <a:off x="594360" y="2894076"/>
-            <a:ext cx="11002975" cy="685800"/>
+            <a:off x="640080" y="2702052"/>
+            <a:ext cx="10911535" cy="731520"/>
           </a:xfrm>
           <a:prstGeom prst="rect">
             <a:avLst/>
@@ -4122,48 +3702,13 @@
           <a:p>
             <a:pPr algn="ctr"/>
             <a:r>
-              <a:rPr sz="4022" b="1" i="0">
+              <a:rPr sz="4300" b="1" i="0">
                 <a:solidFill>
                   <a:srgbClr val="FFFFFF"/>
                 </a:solidFill>
                 <a:latin typeface="Arial"/>
               </a:rPr>
               <a:t>Nossa esperança na vida e na morte?</a:t>
-            </a:r>
-          </a:p>
-        </p:txBody>
-      </p:sp>
-      <p:sp>
-        <p:nvSpPr>
-          <p:cNvPr id="3" name="TextBox 2"/>
-          <p:cNvSpPr txBox="1"/>
-          <p:nvPr/>
-        </p:nvSpPr>
-        <p:spPr>
-          <a:xfrm>
-            <a:off x="594360" y="3616452"/>
-            <a:ext cx="11002975" cy="347472"/>
-          </a:xfrm>
-          <a:prstGeom prst="rect">
-            <a:avLst/>
-          </a:prstGeom>
-          <a:noFill/>
-        </p:spPr>
-        <p:txBody>
-          <a:bodyPr wrap="square">
-            <a:spAutoFit/>
-          </a:bodyPr>
-          <a:lstStyle/>
-          <a:p>
-            <a:pPr algn="ctr"/>
-            <a:r>
-              <a:rPr sz="2200" b="0" i="1">
-                <a:solidFill>
-                  <a:srgbClr val="8C8C8C"/>
-                </a:solidFill>
-                <a:latin typeface="Arial"/>
-              </a:rPr>
-              <a:t/>
             </a:r>
           </a:p>
         </p:txBody>

--- a/output_pptx/Christ_Our_Hope_In_Life_And_Death.pptx
+++ b/output_pptx/Christ_Our_Hope_In_Life_And_Death.pptx
@@ -3172,6 +3172,76 @@
           </a:p>
         </p:txBody>
       </p:sp>
+      <p:sp>
+        <p:nvSpPr>
+          <p:cNvPr id="4" name="TextBox 3"/>
+          <p:cNvSpPr txBox="1"/>
+          <p:nvPr/>
+        </p:nvSpPr>
+        <p:spPr>
+          <a:xfrm>
+            <a:off x="640080" y="4128516"/>
+            <a:ext cx="10911535" cy="310896"/>
+          </a:xfrm>
+          <a:prstGeom prst="rect">
+            <a:avLst/>
+          </a:prstGeom>
+          <a:noFill/>
+        </p:spPr>
+        <p:txBody>
+          <a:bodyPr wrap="square">
+            <a:spAutoFit/>
+          </a:bodyPr>
+          <a:lstStyle/>
+          <a:p>
+            <a:pPr algn="ctr"/>
+            <a:r>
+              <a:rPr sz="2000" b="0" i="0">
+                <a:solidFill>
+                  <a:srgbClr val="828282"/>
+                </a:solidFill>
+                <a:latin typeface="Arial"/>
+              </a:rPr>
+              <a:t>私たちと共にいるキリスト、私たちの前にいるキリスト</a:t>
+            </a:r>
+          </a:p>
+        </p:txBody>
+      </p:sp>
+      <p:sp>
+        <p:nvSpPr>
+          <p:cNvPr id="5" name="TextBox 4"/>
+          <p:cNvSpPr txBox="1"/>
+          <p:nvPr/>
+        </p:nvSpPr>
+        <p:spPr>
+          <a:xfrm>
+            <a:off x="640080" y="4494276"/>
+            <a:ext cx="10911535" cy="310896"/>
+          </a:xfrm>
+          <a:prstGeom prst="rect">
+            <a:avLst/>
+          </a:prstGeom>
+          <a:noFill/>
+        </p:spPr>
+        <p:txBody>
+          <a:bodyPr wrap="square">
+            <a:spAutoFit/>
+          </a:bodyPr>
+          <a:lstStyle/>
+          <a:p>
+            <a:pPr algn="ctr"/>
+            <a:r>
+              <a:rPr sz="2000" b="0" i="0">
+                <a:solidFill>
+                  <a:srgbClr val="828282"/>
+                </a:solidFill>
+                <a:latin typeface="Arial"/>
+              </a:rPr>
+              <a:t>私たちの後ろにいるキリスト、私たちのためにいるキリスト</a:t>
+            </a:r>
+          </a:p>
+        </p:txBody>
+      </p:sp>
     </p:spTree>
   </p:cSld>
   <p:clrMapOvr>
@@ -3268,6 +3338,76 @@
           </a:p>
         </p:txBody>
       </p:sp>
+      <p:sp>
+        <p:nvSpPr>
+          <p:cNvPr id="4" name="TextBox 3"/>
+          <p:cNvSpPr txBox="1"/>
+          <p:nvPr/>
+        </p:nvSpPr>
+        <p:spPr>
+          <a:xfrm>
+            <a:off x="640080" y="4128516"/>
+            <a:ext cx="10911535" cy="310896"/>
+          </a:xfrm>
+          <a:prstGeom prst="rect">
+            <a:avLst/>
+          </a:prstGeom>
+          <a:noFill/>
+        </p:spPr>
+        <p:txBody>
+          <a:bodyPr wrap="square">
+            <a:spAutoFit/>
+          </a:bodyPr>
+          <a:lstStyle/>
+          <a:p>
+            <a:pPr algn="ctr"/>
+            <a:r>
+              <a:rPr sz="2000" b="0" i="0">
+                <a:solidFill>
+                  <a:srgbClr val="828282"/>
+                </a:solidFill>
+                <a:latin typeface="Arial"/>
+              </a:rPr>
+              <a:t>私たちの上にいるキリスト、私たちの中にいるキリスト</a:t>
+            </a:r>
+          </a:p>
+        </p:txBody>
+      </p:sp>
+      <p:sp>
+        <p:nvSpPr>
+          <p:cNvPr id="5" name="TextBox 4"/>
+          <p:cNvSpPr txBox="1"/>
+          <p:nvPr/>
+        </p:nvSpPr>
+        <p:spPr>
+          <a:xfrm>
+            <a:off x="640080" y="4494276"/>
+            <a:ext cx="10911535" cy="310896"/>
+          </a:xfrm>
+          <a:prstGeom prst="rect">
+            <a:avLst/>
+          </a:prstGeom>
+          <a:noFill/>
+        </p:spPr>
+        <p:txBody>
+          <a:bodyPr wrap="square">
+            <a:spAutoFit/>
+          </a:bodyPr>
+          <a:lstStyle/>
+          <a:p>
+            <a:pPr algn="ctr"/>
+            <a:r>
+              <a:rPr sz="2000" b="0" i="0">
+                <a:solidFill>
+                  <a:srgbClr val="828282"/>
+                </a:solidFill>
+                <a:latin typeface="Arial"/>
+              </a:rPr>
+              <a:t>人生と死の中での私たちの希望は？</a:t>
+            </a:r>
+          </a:p>
+        </p:txBody>
+      </p:sp>
     </p:spTree>
   </p:cSld>
   <p:clrMapOvr>
@@ -3364,6 +3504,76 @@
           </a:p>
         </p:txBody>
       </p:sp>
+      <p:sp>
+        <p:nvSpPr>
+          <p:cNvPr id="4" name="TextBox 3"/>
+          <p:cNvSpPr txBox="1"/>
+          <p:nvPr/>
+        </p:nvSpPr>
+        <p:spPr>
+          <a:xfrm>
+            <a:off x="640080" y="4128516"/>
+            <a:ext cx="10911535" cy="310896"/>
+          </a:xfrm>
+          <a:prstGeom prst="rect">
+            <a:avLst/>
+          </a:prstGeom>
+          <a:noFill/>
+        </p:spPr>
+        <p:txBody>
+          <a:bodyPr wrap="square">
+            <a:spAutoFit/>
+          </a:bodyPr>
+          <a:lstStyle/>
+          <a:p>
+            <a:pPr algn="ctr"/>
+            <a:r>
+              <a:rPr sz="2000" b="0" i="0">
+                <a:solidFill>
+                  <a:srgbClr val="828282"/>
+                </a:solidFill>
+                <a:latin typeface="Arial"/>
+              </a:rPr>
+              <a:t>キリストです！</a:t>
+            </a:r>
+          </a:p>
+        </p:txBody>
+      </p:sp>
+      <p:sp>
+        <p:nvSpPr>
+          <p:cNvPr id="5" name="TextBox 4"/>
+          <p:cNvSpPr txBox="1"/>
+          <p:nvPr/>
+        </p:nvSpPr>
+        <p:spPr>
+          <a:xfrm>
+            <a:off x="640080" y="4494276"/>
+            <a:ext cx="10911535" cy="310896"/>
+          </a:xfrm>
+          <a:prstGeom prst="rect">
+            <a:avLst/>
+          </a:prstGeom>
+          <a:noFill/>
+        </p:spPr>
+        <p:txBody>
+          <a:bodyPr wrap="square">
+            <a:spAutoFit/>
+          </a:bodyPr>
+          <a:lstStyle/>
+          <a:p>
+            <a:pPr algn="ctr"/>
+            <a:r>
+              <a:rPr sz="2000" b="0" i="0">
+                <a:solidFill>
+                  <a:srgbClr val="828282"/>
+                </a:solidFill>
+                <a:latin typeface="Arial"/>
+              </a:rPr>
+              <a:t>私たちと共にいるキリスト、私たちの前にいるキリスト</a:t>
+            </a:r>
+          </a:p>
+        </p:txBody>
+      </p:sp>
     </p:spTree>
   </p:cSld>
   <p:clrMapOvr>
@@ -3460,6 +3670,76 @@
           </a:p>
         </p:txBody>
       </p:sp>
+      <p:sp>
+        <p:nvSpPr>
+          <p:cNvPr id="4" name="TextBox 3"/>
+          <p:cNvSpPr txBox="1"/>
+          <p:nvPr/>
+        </p:nvSpPr>
+        <p:spPr>
+          <a:xfrm>
+            <a:off x="640080" y="4128516"/>
+            <a:ext cx="10911535" cy="310896"/>
+          </a:xfrm>
+          <a:prstGeom prst="rect">
+            <a:avLst/>
+          </a:prstGeom>
+          <a:noFill/>
+        </p:spPr>
+        <p:txBody>
+          <a:bodyPr wrap="square">
+            <a:spAutoFit/>
+          </a:bodyPr>
+          <a:lstStyle/>
+          <a:p>
+            <a:pPr algn="ctr"/>
+            <a:r>
+              <a:rPr sz="2000" b="0" i="0">
+                <a:solidFill>
+                  <a:srgbClr val="828282"/>
+                </a:solidFill>
+                <a:latin typeface="Arial"/>
+              </a:rPr>
+              <a:t>私たちの後ろにいるキリスト、私たちのためにいるキリスト</a:t>
+            </a:r>
+          </a:p>
+        </p:txBody>
+      </p:sp>
+      <p:sp>
+        <p:nvSpPr>
+          <p:cNvPr id="5" name="TextBox 4"/>
+          <p:cNvSpPr txBox="1"/>
+          <p:nvPr/>
+        </p:nvSpPr>
+        <p:spPr>
+          <a:xfrm>
+            <a:off x="640080" y="4494276"/>
+            <a:ext cx="10911535" cy="310896"/>
+          </a:xfrm>
+          <a:prstGeom prst="rect">
+            <a:avLst/>
+          </a:prstGeom>
+          <a:noFill/>
+        </p:spPr>
+        <p:txBody>
+          <a:bodyPr wrap="square">
+            <a:spAutoFit/>
+          </a:bodyPr>
+          <a:lstStyle/>
+          <a:p>
+            <a:pPr algn="ctr"/>
+            <a:r>
+              <a:rPr sz="2000" b="0" i="0">
+                <a:solidFill>
+                  <a:srgbClr val="828282"/>
+                </a:solidFill>
+                <a:latin typeface="Arial"/>
+              </a:rPr>
+              <a:t>私たちの上にいるキリスト、私たちの中にいるキリスト</a:t>
+            </a:r>
+          </a:p>
+        </p:txBody>
+      </p:sp>
     </p:spTree>
   </p:cSld>
   <p:clrMapOvr>
@@ -3556,6 +3836,76 @@
           </a:p>
         </p:txBody>
       </p:sp>
+      <p:sp>
+        <p:nvSpPr>
+          <p:cNvPr id="4" name="TextBox 3"/>
+          <p:cNvSpPr txBox="1"/>
+          <p:nvPr/>
+        </p:nvSpPr>
+        <p:spPr>
+          <a:xfrm>
+            <a:off x="640080" y="4128516"/>
+            <a:ext cx="10911535" cy="310896"/>
+          </a:xfrm>
+          <a:prstGeom prst="rect">
+            <a:avLst/>
+          </a:prstGeom>
+          <a:noFill/>
+        </p:spPr>
+        <p:txBody>
+          <a:bodyPr wrap="square">
+            <a:spAutoFit/>
+          </a:bodyPr>
+          <a:lstStyle/>
+          <a:p>
+            <a:pPr algn="ctr"/>
+            <a:r>
+              <a:rPr sz="2000" b="0" i="0">
+                <a:solidFill>
+                  <a:srgbClr val="828282"/>
+                </a:solidFill>
+                <a:latin typeface="Arial"/>
+              </a:rPr>
+              <a:t>キリストです！</a:t>
+            </a:r>
+          </a:p>
+        </p:txBody>
+      </p:sp>
+      <p:sp>
+        <p:nvSpPr>
+          <p:cNvPr id="5" name="TextBox 4"/>
+          <p:cNvSpPr txBox="1"/>
+          <p:nvPr/>
+        </p:nvSpPr>
+        <p:spPr>
+          <a:xfrm>
+            <a:off x="640080" y="4494276"/>
+            <a:ext cx="10911535" cy="310896"/>
+          </a:xfrm>
+          <a:prstGeom prst="rect">
+            <a:avLst/>
+          </a:prstGeom>
+          <a:noFill/>
+        </p:spPr>
+        <p:txBody>
+          <a:bodyPr wrap="square">
+            <a:spAutoFit/>
+          </a:bodyPr>
+          <a:lstStyle/>
+          <a:p>
+            <a:pPr algn="ctr"/>
+            <a:r>
+              <a:rPr sz="2000" b="0" i="0">
+                <a:solidFill>
+                  <a:srgbClr val="828282"/>
+                </a:solidFill>
+                <a:latin typeface="Arial"/>
+              </a:rPr>
+              <a:t>私たちと共にいるキリスト、私たちの前にいるキリスト</a:t>
+            </a:r>
+          </a:p>
+        </p:txBody>
+      </p:sp>
     </p:spTree>
   </p:cSld>
   <p:clrMapOvr>
@@ -3652,6 +4002,76 @@
           </a:p>
         </p:txBody>
       </p:sp>
+      <p:sp>
+        <p:nvSpPr>
+          <p:cNvPr id="4" name="TextBox 3"/>
+          <p:cNvSpPr txBox="1"/>
+          <p:nvPr/>
+        </p:nvSpPr>
+        <p:spPr>
+          <a:xfrm>
+            <a:off x="640080" y="4128516"/>
+            <a:ext cx="10911535" cy="310896"/>
+          </a:xfrm>
+          <a:prstGeom prst="rect">
+            <a:avLst/>
+          </a:prstGeom>
+          <a:noFill/>
+        </p:spPr>
+        <p:txBody>
+          <a:bodyPr wrap="square">
+            <a:spAutoFit/>
+          </a:bodyPr>
+          <a:lstStyle/>
+          <a:p>
+            <a:pPr algn="ctr"/>
+            <a:r>
+              <a:rPr sz="2000" b="0" i="0">
+                <a:solidFill>
+                  <a:srgbClr val="828282"/>
+                </a:solidFill>
+                <a:latin typeface="Arial"/>
+              </a:rPr>
+              <a:t>私たちの後ろにいるキリスト、私たちのためにいるキリスト</a:t>
+            </a:r>
+          </a:p>
+        </p:txBody>
+      </p:sp>
+      <p:sp>
+        <p:nvSpPr>
+          <p:cNvPr id="5" name="TextBox 4"/>
+          <p:cNvSpPr txBox="1"/>
+          <p:nvPr/>
+        </p:nvSpPr>
+        <p:spPr>
+          <a:xfrm>
+            <a:off x="640080" y="4494276"/>
+            <a:ext cx="10911535" cy="310896"/>
+          </a:xfrm>
+          <a:prstGeom prst="rect">
+            <a:avLst/>
+          </a:prstGeom>
+          <a:noFill/>
+        </p:spPr>
+        <p:txBody>
+          <a:bodyPr wrap="square">
+            <a:spAutoFit/>
+          </a:bodyPr>
+          <a:lstStyle/>
+          <a:p>
+            <a:pPr algn="ctr"/>
+            <a:r>
+              <a:rPr sz="2000" b="0" i="0">
+                <a:solidFill>
+                  <a:srgbClr val="828282"/>
+                </a:solidFill>
+                <a:latin typeface="Arial"/>
+              </a:rPr>
+              <a:t>私たちの上にいるキリスト、私たちの中にいるキリスト</a:t>
+            </a:r>
+          </a:p>
+        </p:txBody>
+      </p:sp>
     </p:spTree>
   </p:cSld>
   <p:clrMapOvr>
@@ -3709,6 +4129,41 @@
                 <a:latin typeface="Arial"/>
               </a:rPr>
               <a:t>Nossa esperança na vida e na morte?</a:t>
+            </a:r>
+          </a:p>
+        </p:txBody>
+      </p:sp>
+      <p:sp>
+        <p:nvSpPr>
+          <p:cNvPr id="3" name="TextBox 2"/>
+          <p:cNvSpPr txBox="1"/>
+          <p:nvPr/>
+        </p:nvSpPr>
+        <p:spPr>
+          <a:xfrm>
+            <a:off x="640080" y="3845052"/>
+            <a:ext cx="10911535" cy="310896"/>
+          </a:xfrm>
+          <a:prstGeom prst="rect">
+            <a:avLst/>
+          </a:prstGeom>
+          <a:noFill/>
+        </p:spPr>
+        <p:txBody>
+          <a:bodyPr wrap="square">
+            <a:spAutoFit/>
+          </a:bodyPr>
+          <a:lstStyle/>
+          <a:p>
+            <a:pPr algn="ctr"/>
+            <a:r>
+              <a:rPr sz="2000" b="0" i="0">
+                <a:solidFill>
+                  <a:srgbClr val="828282"/>
+                </a:solidFill>
+                <a:latin typeface="Arial"/>
+              </a:rPr>
+              <a:t>人生と死の中での私たちの希望は？</a:t>
             </a:r>
           </a:p>
         </p:txBody>
